--- a/dist/초5/수학/도형과측정/초5_수학_도형과측정_01_규칙과대응.pptx
+++ b/dist/초5/수학/도형과측정/초5_수학_도형과측정_01_규칙과대응.pptx
@@ -120,13 +120,13 @@
   <p:extLst>
     <p:ext uri="{521415D9-36F7-43E2-AB2F-B90AF26B5E84}">
       <p14:sectionLst xmlns:p14="http://schemas.microsoft.com/office/powerpoint/2010/main">
-        <p14:section name="도입" id="{0b39592d-45a9-8c98-b53b-c43d6ccf5c8a}">
+        <p14:section name="도입" id="{3ec2c356-a1a9-4367-85ec-514313a378b7}">
           <p14:sldIdLst>
             <p14:sldId id="256"/>
             <p14:sldId id="257"/>
           </p14:sldIdLst>
         </p14:section>
-        <p14:section name="개념" id="{902587ef-01b9-013c-ac39-b1ab70b4268f}">
+        <p14:section name="개념" id="{314c4311-43db-3b7f-c7dd-a9a742a07c45}">
           <p14:sldIdLst>
             <p14:sldId id="258"/>
             <p14:sldId id="259"/>
@@ -134,32 +134,32 @@
             <p14:sldId id="262"/>
           </p14:sldIdLst>
         </p14:section>
-        <p14:section name="연습" id="{4d6601b5-9a36-f13f-7166-25b12dfb00b7}">
+        <p14:section name="연습" id="{408261f1-bd7a-1109-c28b-5b6cffb477a6}">
           <p14:sldIdLst>
             <p14:sldId id="261"/>
             <p14:sldId id="263"/>
             <p14:sldId id="264"/>
           </p14:sldIdLst>
         </p14:section>
-        <p14:section name="개념" id="{48b6de56-f86b-2b1f-8fd5-881813da57dc}">
+        <p14:section name="개념" id="{4d7d961c-4b3b-97c4-38ed-c5e0b5c6da01}">
           <p14:sldIdLst/>
         </p14:section>
-        <p14:section name="연습" id="{63a48337-56bc-6a73-a401-9757ec4c72e4}">
+        <p14:section name="연습" id="{99336c0c-829c-56a9-0a57-3150af1ab117}">
           <p14:sldIdLst/>
         </p14:section>
-        <p14:section name="확인" id="{a3fcce9d-073b-5255-231e-318d30adfa82}">
+        <p14:section name="확인" id="{570291ec-1d3f-1202-971c-1de220fd08f6}">
           <p14:sldIdLst>
             <p14:sldId id="265"/>
             <p14:sldId id="266"/>
             <p14:sldId id="267"/>
           </p14:sldIdLst>
         </p14:section>
-        <p14:section name="정리" id="{02ec783d-3c45-3bde-8913-30096ee2045d}">
+        <p14:section name="정리" id="{e30eaed9-8bf9-6932-5a22-1e316facd4f5}">
           <p14:sldIdLst>
             <p14:sldId id="268"/>
           </p14:sldIdLst>
         </p14:section>
-        <p14:section name="보충" id="{f7ccdd27-6108-88d5-728a-ff61d562cb8f}">
+        <p14:section name="보충" id="{a76f8951-780c-e57e-7b6c-f6fac426c080}">
           <p14:sldIdLst>
             <p14:sldId id="269"/>
           </p14:sldIdLst>
